--- a/ppt/2026-10-19_P0122001_S_150559-GRY-9.pptx
+++ b/ppt/2026-10-19_P0122001_S_150559-GRY-9.pptx
@@ -1855,7 +1855,7 @@
                 <a:ea typeface="Microsoft JhengHei" pitchFamily="34" charset="-122"/>
                 <a:cs typeface="Microsoft JhengHei" pitchFamily="34" charset="-120"/>
               </a:rPr>
-              <a:t>📢 「D‘LITES 20 週年限定款 &amp; D‘LITES 6.0 強勢登場」430,651（2 個月前）；「Skechers D'Lites Dazzling Shine 2026</a:t>
+              <a:t>📢 「D‘LITES 20 週年限定款 &amp; D‘LITES 6.0 強勢登場」430,651（2 個月前）；「Skechers D'Lites Dazzling Shine 2026 ｜ Every Detail Up Close! …」318（3 個月前）——D’LITES 20 週年限定款＋6.0 新登場官方片 43 萬 views（2個月前），復古厚底鞋熱潮持續</a:t>
             </a:r>
             <a:endParaRPr lang="en-US" sz="950" dirty="0"/>
           </a:p>
